--- a/temp/8.pptx
+++ b/temp/8.pptx
@@ -677,7 +677,7 @@
               </a:lnSpc>
             </a:pPr>
             <a:r>
-              <a:rPr b="1" lang="es-MX" strike="noStrike" sz="4150" u="none">
+              <a:rPr b="1" lang="es-MX" strike="noStrike" sz="3750" u="none">
                 <a:solidFill>
                   <a:srgbClr val="000000"/>
                 </a:solidFill>
@@ -733,7 +733,7 @@
               </a:lnSpc>
             </a:pPr>
             <a:r>
-              <a:rPr b="0" lang="es-MX" strike="noStrike" sz="3950" u="none">
+              <a:rPr b="0" lang="es-MX" strike="noStrike" sz="3350" u="none">
                 <a:solidFill>
                   <a:srgbClr val="000000"/>
                 </a:solidFill>
@@ -796,7 +796,7 @@
               <a:buChar char=""/>
             </a:pPr>
             <a:r>
-              <a:rPr lang="en-US" b="false" i="false" u="none" sz="1650">
+              <a:rPr lang="en-US" b="false" i="false" u="none" sz="450">
                 <a:solidFill>
                   <a:srgbClr val="000000"/>
                 </a:solidFill>
@@ -850,7 +850,7 @@
               <a:buChar char=""/>
             </a:pPr>
             <a:r>
-              <a:rPr lang="en-US" b="false" i="false" u="none" sz="1650">
+              <a:rPr lang="en-US" b="false" i="false" u="none" sz="450">
                 <a:solidFill>
                   <a:srgbClr val="000000"/>
                 </a:solidFill>
@@ -904,7 +904,7 @@
               <a:buChar char=""/>
             </a:pPr>
             <a:r>
-              <a:rPr lang="en-US" b="false" i="false" u="none" sz="1650">
+              <a:rPr lang="en-US" b="false" i="false" u="none" sz="450">
                 <a:solidFill>
                   <a:srgbClr val="000000"/>
                 </a:solidFill>
@@ -958,7 +958,7 @@
               <a:buChar char=""/>
             </a:pPr>
             <a:r>
-              <a:rPr lang="en-US" b="false" i="false" u="none" sz="1650">
+              <a:rPr lang="en-US" b="false" i="false" u="none" sz="450">
                 <a:solidFill>
                   <a:srgbClr val="000000"/>
                 </a:solidFill>
@@ -1012,7 +1012,7 @@
               <a:buChar char=""/>
             </a:pPr>
             <a:r>
-              <a:rPr lang="en-US" b="false" i="false" u="none" sz="1650">
+              <a:rPr lang="en-US" b="false" i="false" u="none" sz="450">
                 <a:solidFill>
                   <a:srgbClr val="000000"/>
                 </a:solidFill>
